--- a/Schools_ML_Track/camp_2026/slides/ML/ML18.pptx
+++ b/Schools_ML_Track/camp_2026/slides/ML/ML18.pptx
@@ -127,7 +127,7 @@
   <p:extLst>
     <p:ext uri="{521415D9-36F7-43E2-AB2F-B90AF26B5E84}">
       <p14:sectionLst xmlns:p14="http://schemas.microsoft.com/office/powerpoint/2010/main">
-        <p14:section name="Opening" id="{38c13fd6-16d5-4dcc-bc39-d70eb66b559f}">
+        <p14:section name="Opening" id="{e4fba202-fe45-396b-04c0-2eb07bd6da2c}">
           <p14:sldIdLst>
             <p14:sldId id="256"/>
             <p14:sldId id="257"/>
@@ -138,7 +138,7 @@
             <p14:sldId id="262"/>
           </p14:sldIdLst>
         </p14:section>
-        <p14:section name="Block A" id="{71f84cbe-208e-4a80-31b7-b1178ee0d735}">
+        <p14:section name="Block A" id="{adb7fbf7-f7d5-2094-d08f-4ed552e6847a}">
           <p14:sldIdLst>
             <p14:sldId id="263"/>
             <p14:sldId id="264"/>
@@ -147,15 +147,15 @@
             <p14:sldId id="268"/>
           </p14:sldIdLst>
         </p14:section>
-        <p14:section name="Break" id="{2a4acbf2-d768-9804-6b5d-2740e349d783}">
+        <p14:section name="Break" id="{34ff934a-2dd5-69cb-b6e7-27f378872784}">
           <p14:sldIdLst>
             <p14:sldId id="267"/>
           </p14:sldIdLst>
         </p14:section>
-        <p14:section name="Block A" id="{7cd5b9df-6e1a-4038-c3ef-fd04f00b82d4}">
+        <p14:section name="Block A" id="{c418fa40-3e38-b9cf-d181-c340f9223d26}">
           <p14:sldIdLst/>
         </p14:section>
-        <p14:section name="Block B" id="{20f07aee-4cec-8baf-776a-2a95342cf55d}">
+        <p14:section name="Block B" id="{958f5871-2f4f-3b6b-ca07-28e94d3e3983}">
           <p14:sldIdLst>
             <p14:sldId id="269"/>
             <p14:sldId id="270"/>
@@ -164,7 +164,7 @@
             <p14:sldId id="273"/>
           </p14:sldIdLst>
         </p14:section>
-        <p14:section name="Make and close" id="{d4cc0e89-12c4-f2e5-e3df-78101ce12514}">
+        <p14:section name="Make and close" id="{96942ee9-3067-8fc1-65d1-def7d307b890}">
           <p14:sldIdLst>
             <p14:sldId id="274"/>
             <p14:sldId id="275"/>

--- a/Schools_ML_Track/camp_2026/slides/ML/ML18.pptx
+++ b/Schools_ML_Track/camp_2026/slides/ML/ML18.pptx
@@ -127,7 +127,7 @@
   <p:extLst>
     <p:ext uri="{521415D9-36F7-43E2-AB2F-B90AF26B5E84}">
       <p14:sectionLst xmlns:p14="http://schemas.microsoft.com/office/powerpoint/2010/main">
-        <p14:section name="Opening" id="{e4fba202-fe45-396b-04c0-2eb07bd6da2c}">
+        <p14:section name="Opening" id="{a63abb7b-4d77-cc83-c5fc-8616c706a720}">
           <p14:sldIdLst>
             <p14:sldId id="256"/>
             <p14:sldId id="257"/>
@@ -138,7 +138,7 @@
             <p14:sldId id="262"/>
           </p14:sldIdLst>
         </p14:section>
-        <p14:section name="Block A" id="{adb7fbf7-f7d5-2094-d08f-4ed552e6847a}">
+        <p14:section name="Block A" id="{8e733fff-9c7a-b9ea-8729-a95f09268d7e}">
           <p14:sldIdLst>
             <p14:sldId id="263"/>
             <p14:sldId id="264"/>
@@ -147,15 +147,15 @@
             <p14:sldId id="268"/>
           </p14:sldIdLst>
         </p14:section>
-        <p14:section name="Break" id="{34ff934a-2dd5-69cb-b6e7-27f378872784}">
+        <p14:section name="Break" id="{a56c8a4a-6c4e-a4f3-0e54-4ce0b546a4f0}">
           <p14:sldIdLst>
             <p14:sldId id="267"/>
           </p14:sldIdLst>
         </p14:section>
-        <p14:section name="Block A" id="{c418fa40-3e38-b9cf-d181-c340f9223d26}">
+        <p14:section name="Block A" id="{cefecd7c-f5c0-c1dc-07b5-18baa1a923e1}">
           <p14:sldIdLst/>
         </p14:section>
-        <p14:section name="Block B" id="{958f5871-2f4f-3b6b-ca07-28e94d3e3983}">
+        <p14:section name="Block B" id="{bde3fb32-3dc9-957b-345c-d4323f6c6b39}">
           <p14:sldIdLst>
             <p14:sldId id="269"/>
             <p14:sldId id="270"/>
@@ -164,7 +164,7 @@
             <p14:sldId id="273"/>
           </p14:sldIdLst>
         </p14:section>
-        <p14:section name="Make and close" id="{96942ee9-3067-8fc1-65d1-def7d307b890}">
+        <p14:section name="Make and close" id="{24956ee0-1dec-4ef4-1b45-f2e0b5381980}">
           <p14:sldIdLst>
             <p14:sldId id="274"/>
             <p14:sldId id="275"/>
@@ -3104,7 +3104,24 @@
                 <a:ea typeface="Lato" pitchFamily="34" charset="-122"/>
                 <a:cs typeface="Lato" pitchFamily="34" charset="-120"/>
               </a:rPr>
-              <a:t>Checkpoint two with a locked test</a:t>
+              <a:t>Checkpoint two</a:t>
+            </a:r>
+            <a:endParaRPr lang="en-US" sz="5600" dirty="0"/>
+          </a:p>
+          <a:p>
+            <a:pPr algn="l" indent="0" marL="0">
+              <a:buNone/>
+            </a:pPr>
+            <a:r>
+              <a:rPr lang="en-US" sz="5600" b="1" dirty="0">
+                <a:solidFill>
+                  <a:srgbClr val="FFFFFF"/>
+                </a:solidFill>
+                <a:latin typeface="Lato" pitchFamily="34" charset="0"/>
+                <a:ea typeface="Lato" pitchFamily="34" charset="-122"/>
+                <a:cs typeface="Lato" pitchFamily="34" charset="-120"/>
+              </a:rPr>
+              <a:t>with a locked test</a:t>
             </a:r>
             <a:endParaRPr lang="en-US" sz="5600" dirty="0"/>
           </a:p>
@@ -5148,7 +5165,7 @@
                 <a:spcPts val="3240"/>
               </a:lnSpc>
               <a:spcAft>
-                <a:spcPts val="2520"/>
+                <a:spcPts val="2020"/>
               </a:spcAft>
               <a:buNone/>
             </a:pPr>
@@ -5161,7 +5178,7 @@
                 <a:ea typeface="Lato" pitchFamily="34" charset="-122"/>
                 <a:cs typeface="Lato" pitchFamily="34" charset="-120"/>
               </a:rPr>
-              <a:t>Submit ML18.ipynb with: the split sizes, the baseline, two validation scores, the chosen depth, the final test accuracy, the confusion matrix and two limitations. Explain your decision without claiming that the highest score proves one depth is best in general.</a:t>
+              <a:t>Submit ML18.ipynb with: the split sizes, the baseline, two validation scores, the chosen depth, the final test accuracy, the confusion matrix and two limitations.</a:t>
             </a:r>
             <a:endParaRPr lang="en-US" sz="2700" dirty="0"/>
           </a:p>
@@ -5171,7 +5188,30 @@
                 <a:spcPts val="3240"/>
               </a:lnSpc>
               <a:spcAft>
-                <a:spcPts val="2520"/>
+                <a:spcPts val="2020"/>
+              </a:spcAft>
+              <a:buNone/>
+            </a:pPr>
+            <a:r>
+              <a:rPr lang="en-US" sz="2700" dirty="0">
+                <a:solidFill>
+                  <a:srgbClr val="111111"/>
+                </a:solidFill>
+                <a:latin typeface="Lato" pitchFamily="34" charset="0"/>
+                <a:ea typeface="Lato" pitchFamily="34" charset="-122"/>
+                <a:cs typeface="Lato" pitchFamily="34" charset="-120"/>
+              </a:rPr>
+              <a:t>Explain your decision without claiming that the highest score proves one depth is best in general.</a:t>
+            </a:r>
+            <a:endParaRPr lang="en-US" sz="2700" dirty="0"/>
+          </a:p>
+          <a:p>
+            <a:pPr algn="l" indent="0" marL="0">
+              <a:lnSpc>
+                <a:spcPts val="3240"/>
+              </a:lnSpc>
+              <a:spcAft>
+                <a:spcPts val="2020"/>
               </a:spcAft>
               <a:buNone/>
             </a:pPr>
@@ -7688,11 +7728,11 @@
         <p:spPr>
           <a:xfrm>
             <a:off x="640080" y="1645920"/>
-            <a:ext cx="10881360" cy="3344672"/>
+            <a:ext cx="10881360" cy="3383280"/>
           </a:xfrm>
           <a:prstGeom prst="roundRect">
             <a:avLst>
-              <a:gd name="adj" fmla="val 2187"/>
+              <a:gd name="adj" fmla="val 2162"/>
             </a:avLst>
           </a:prstGeom>
           <a:solidFill>
@@ -7710,7 +7750,7 @@
         <p:spPr>
           <a:xfrm>
             <a:off x="841248" y="1847088"/>
-            <a:ext cx="10479024" cy="2942336"/>
+            <a:ext cx="10479024" cy="2980944"/>
           </a:xfrm>
           <a:prstGeom prst="rect">
             <a:avLst/>
@@ -7724,12 +7764,12 @@
           <a:p>
             <a:pPr algn="l" indent="0" marL="0">
               <a:lnSpc>
-                <a:spcPts val="2080"/>
+                <a:spcPts val="2340"/>
               </a:lnSpc>
               <a:buNone/>
             </a:pPr>
             <a:r>
-              <a:rPr lang="en-US" sz="1600" b="1" dirty="0">
+              <a:rPr lang="en-US" sz="1800" b="1" dirty="0">
                 <a:solidFill>
                   <a:srgbClr val="FFFFFF"/>
                 </a:solidFill>
@@ -7741,12 +7781,12 @@
             </a:r>
             <a:pPr algn="l" indent="0" marL="0">
               <a:lnSpc>
-                <a:spcPts val="2080"/>
+                <a:spcPts val="2340"/>
               </a:lnSpc>
               <a:buNone/>
             </a:pPr>
             <a:r>
-              <a:rPr lang="en-US" sz="1600" dirty="0">
+              <a:rPr lang="en-US" sz="1800" dirty="0">
                 <a:solidFill>
                   <a:srgbClr val="FFFFFF"/>
                 </a:solidFill>
@@ -7758,12 +7798,12 @@
             </a:r>
             <a:pPr algn="l" indent="0" marL="0">
               <a:lnSpc>
-                <a:spcPts val="2080"/>
+                <a:spcPts val="2340"/>
               </a:lnSpc>
               <a:buNone/>
             </a:pPr>
             <a:r>
-              <a:rPr lang="en-US" sz="1600" b="1" dirty="0">
+              <a:rPr lang="en-US" sz="1800" b="1" dirty="0">
                 <a:solidFill>
                   <a:srgbClr val="FFFFFF"/>
                 </a:solidFill>
@@ -7775,12 +7815,12 @@
             </a:r>
             <a:pPr algn="l" indent="0" marL="0">
               <a:lnSpc>
-                <a:spcPts val="2080"/>
+                <a:spcPts val="2340"/>
               </a:lnSpc>
               <a:buNone/>
             </a:pPr>
             <a:r>
-              <a:rPr lang="en-US" sz="1600" dirty="0">
+              <a:rPr lang="en-US" sz="1800" dirty="0">
                 <a:solidFill>
                   <a:srgbClr val="FFFFFF"/>
                 </a:solidFill>
@@ -7790,17 +7830,17 @@
               </a:rPr>
               <a:t> load_iris</a:t>
             </a:r>
-            <a:endParaRPr lang="en-US" sz="1600" dirty="0"/>
+            <a:endParaRPr lang="en-US" sz="1800" dirty="0"/>
           </a:p>
           <a:p>
             <a:pPr algn="l" indent="0" marL="0">
               <a:lnSpc>
-                <a:spcPts val="2080"/>
+                <a:spcPts val="2340"/>
               </a:lnSpc>
               <a:buNone/>
             </a:pPr>
             <a:r>
-              <a:rPr lang="en-US" sz="1600" b="1" dirty="0">
+              <a:rPr lang="en-US" sz="1800" b="1" dirty="0">
                 <a:solidFill>
                   <a:srgbClr val="FFFFFF"/>
                 </a:solidFill>
@@ -7812,12 +7852,12 @@
             </a:r>
             <a:pPr algn="l" indent="0" marL="0">
               <a:lnSpc>
-                <a:spcPts val="2080"/>
+                <a:spcPts val="2340"/>
               </a:lnSpc>
               <a:buNone/>
             </a:pPr>
             <a:r>
-              <a:rPr lang="en-US" sz="1600" dirty="0">
+              <a:rPr lang="en-US" sz="1800" dirty="0">
                 <a:solidFill>
                   <a:srgbClr val="FFFFFF"/>
                 </a:solidFill>
@@ -7829,12 +7869,12 @@
             </a:r>
             <a:pPr algn="l" indent="0" marL="0">
               <a:lnSpc>
-                <a:spcPts val="2080"/>
+                <a:spcPts val="2340"/>
               </a:lnSpc>
               <a:buNone/>
             </a:pPr>
             <a:r>
-              <a:rPr lang="en-US" sz="1600" b="1" dirty="0">
+              <a:rPr lang="en-US" sz="1800" b="1" dirty="0">
                 <a:solidFill>
                   <a:srgbClr val="FFFFFF"/>
                 </a:solidFill>
@@ -7846,12 +7886,12 @@
             </a:r>
             <a:pPr algn="l" indent="0" marL="0">
               <a:lnSpc>
-                <a:spcPts val="2080"/>
+                <a:spcPts val="2340"/>
               </a:lnSpc>
               <a:buNone/>
             </a:pPr>
             <a:r>
-              <a:rPr lang="en-US" sz="1600" dirty="0">
+              <a:rPr lang="en-US" sz="1800" dirty="0">
                 <a:solidFill>
                   <a:srgbClr val="FFFFFF"/>
                 </a:solidFill>
@@ -7861,17 +7901,17 @@
               </a:rPr>
               <a:t> train_test_split</a:t>
             </a:r>
-            <a:endParaRPr lang="en-US" sz="1600" dirty="0"/>
+            <a:endParaRPr lang="en-US" sz="1800" dirty="0"/>
           </a:p>
           <a:p>
             <a:pPr algn="l" indent="0" marL="0">
               <a:lnSpc>
-                <a:spcPts val="2080"/>
+                <a:spcPts val="2340"/>
               </a:lnSpc>
               <a:buNone/>
             </a:pPr>
             <a:r>
-              <a:rPr lang="en-US" sz="1600" dirty="0">
+              <a:rPr lang="en-US" sz="1800" dirty="0">
                 <a:solidFill>
                   <a:srgbClr val="FFFFFF"/>
                 </a:solidFill>
@@ -7883,12 +7923,12 @@
             </a:r>
             <a:pPr algn="l" indent="0" marL="0">
               <a:lnSpc>
-                <a:spcPts val="2080"/>
+                <a:spcPts val="2340"/>
               </a:lnSpc>
               <a:buNone/>
             </a:pPr>
             <a:r>
-              <a:rPr lang="en-US" sz="1600" b="1" dirty="0">
+              <a:rPr lang="en-US" sz="1800" b="1" dirty="0">
                 <a:solidFill>
                   <a:srgbClr val="FFFFFF"/>
                 </a:solidFill>
@@ -7900,12 +7940,12 @@
             </a:r>
             <a:pPr algn="l" indent="0" marL="0">
               <a:lnSpc>
-                <a:spcPts val="2080"/>
+                <a:spcPts val="2340"/>
               </a:lnSpc>
               <a:buNone/>
             </a:pPr>
             <a:r>
-              <a:rPr lang="en-US" sz="1600" dirty="0">
+              <a:rPr lang="en-US" sz="1800" dirty="0">
                 <a:solidFill>
                   <a:srgbClr val="FFFFFF"/>
                 </a:solidFill>
@@ -7915,17 +7955,17 @@
               </a:rPr>
               <a:t>)</a:t>
             </a:r>
-            <a:endParaRPr lang="en-US" sz="1600" dirty="0"/>
+            <a:endParaRPr lang="en-US" sz="1800" dirty="0"/>
           </a:p>
           <a:p>
             <a:pPr algn="l" indent="0" marL="0">
               <a:lnSpc>
-                <a:spcPts val="2080"/>
+                <a:spcPts val="2340"/>
               </a:lnSpc>
               <a:buNone/>
             </a:pPr>
             <a:r>
-              <a:rPr lang="en-US" sz="1600" dirty="0">
+              <a:rPr lang="en-US" sz="1800" dirty="0">
                 <a:solidFill>
                   <a:srgbClr val="FFFFFF"/>
                 </a:solidFill>
@@ -7935,17 +7975,17 @@
               </a:rPr>
               <a:t>X_dev, X_test, y_dev, y_test = train_test_split(</a:t>
             </a:r>
-            <a:endParaRPr lang="en-US" sz="1600" dirty="0"/>
+            <a:endParaRPr lang="en-US" sz="1800" dirty="0"/>
           </a:p>
           <a:p>
             <a:pPr algn="l" indent="0" marL="0">
               <a:lnSpc>
-                <a:spcPts val="2080"/>
+                <a:spcPts val="2340"/>
               </a:lnSpc>
               <a:buNone/>
             </a:pPr>
             <a:r>
-              <a:rPr lang="en-US" sz="1600" dirty="0">
+              <a:rPr lang="en-US" sz="1800" dirty="0">
                 <a:solidFill>
                   <a:srgbClr val="FFFFFF"/>
                 </a:solidFill>
@@ -7955,17 +7995,17 @@
               </a:rPr>
               <a:t>    X, y, test_size=0.2, random_state=7, stratify=y</a:t>
             </a:r>
-            <a:endParaRPr lang="en-US" sz="1600" dirty="0"/>
+            <a:endParaRPr lang="en-US" sz="1800" dirty="0"/>
           </a:p>
           <a:p>
             <a:pPr algn="l" indent="0" marL="0">
               <a:lnSpc>
-                <a:spcPts val="2080"/>
+                <a:spcPts val="2340"/>
               </a:lnSpc>
               <a:buNone/>
             </a:pPr>
             <a:r>
-              <a:rPr lang="en-US" sz="1600" dirty="0">
+              <a:rPr lang="en-US" sz="1800" dirty="0">
                 <a:solidFill>
                   <a:srgbClr val="FFFFFF"/>
                 </a:solidFill>
@@ -7975,17 +8015,17 @@
               </a:rPr>
               <a:t>)</a:t>
             </a:r>
-            <a:endParaRPr lang="en-US" sz="1600" dirty="0"/>
+            <a:endParaRPr lang="en-US" sz="1800" dirty="0"/>
           </a:p>
           <a:p>
             <a:pPr algn="l" indent="0" marL="0">
               <a:lnSpc>
-                <a:spcPts val="2080"/>
+                <a:spcPts val="2340"/>
               </a:lnSpc>
               <a:buNone/>
             </a:pPr>
             <a:r>
-              <a:rPr lang="en-US" sz="1600" dirty="0">
+              <a:rPr lang="en-US" sz="1800" dirty="0">
                 <a:solidFill>
                   <a:srgbClr val="FFFFFF"/>
                 </a:solidFill>
@@ -7995,17 +8035,17 @@
               </a:rPr>
               <a:t>X_train, X_val, y_train, y_val = train_test_split(</a:t>
             </a:r>
-            <a:endParaRPr lang="en-US" sz="1600" dirty="0"/>
+            <a:endParaRPr lang="en-US" sz="1800" dirty="0"/>
           </a:p>
           <a:p>
             <a:pPr algn="l" indent="0" marL="0">
               <a:lnSpc>
-                <a:spcPts val="2080"/>
+                <a:spcPts val="2340"/>
               </a:lnSpc>
               <a:buNone/>
             </a:pPr>
             <a:r>
-              <a:rPr lang="en-US" sz="1600" dirty="0">
+              <a:rPr lang="en-US" sz="1800" dirty="0">
                 <a:solidFill>
                   <a:srgbClr val="FFFFFF"/>
                 </a:solidFill>
@@ -8013,19 +8053,19 @@
                 <a:ea typeface="Courier New" pitchFamily="34" charset="-122"/>
                 <a:cs typeface="Courier New" pitchFamily="34" charset="-120"/>
               </a:rPr>
-              <a:t>    X_dev, y_dev, test_size=0.25, random_state=7,</a:t>
-            </a:r>
-            <a:endParaRPr lang="en-US" sz="1600" dirty="0"/>
+              <a:t>    X_dev, y_dev, test_size=0.25, random_state=7, stratify=y_dev</a:t>
+            </a:r>
+            <a:endParaRPr lang="en-US" sz="1800" dirty="0"/>
           </a:p>
           <a:p>
             <a:pPr algn="l" indent="0" marL="0">
               <a:lnSpc>
-                <a:spcPts val="2080"/>
+                <a:spcPts val="2340"/>
               </a:lnSpc>
               <a:buNone/>
             </a:pPr>
             <a:r>
-              <a:rPr lang="en-US" sz="1600" dirty="0">
+              <a:rPr lang="en-US" sz="1800" dirty="0">
                 <a:solidFill>
                   <a:srgbClr val="FFFFFF"/>
                 </a:solidFill>
@@ -8033,19 +8073,19 @@
                 <a:ea typeface="Courier New" pitchFamily="34" charset="-122"/>
                 <a:cs typeface="Courier New" pitchFamily="34" charset="-120"/>
               </a:rPr>
-              <a:t>    stratify=y_dev</a:t>
-            </a:r>
-            <a:endParaRPr lang="en-US" sz="1600" dirty="0"/>
+              <a:t>)</a:t>
+            </a:r>
+            <a:endParaRPr lang="en-US" sz="1800" dirty="0"/>
           </a:p>
           <a:p>
             <a:pPr algn="l" indent="0" marL="0">
               <a:lnSpc>
-                <a:spcPts val="2080"/>
+                <a:spcPts val="2340"/>
               </a:lnSpc>
               <a:buNone/>
             </a:pPr>
             <a:r>
-              <a:rPr lang="en-US" sz="1600" dirty="0">
+              <a:rPr lang="en-US" sz="1800" dirty="0">
                 <a:solidFill>
                   <a:srgbClr val="FFFFFF"/>
                 </a:solidFill>
@@ -8053,29 +8093,9 @@
                 <a:ea typeface="Courier New" pitchFamily="34" charset="-122"/>
                 <a:cs typeface="Courier New" pitchFamily="34" charset="-120"/>
               </a:rPr>
-              <a:t>)</a:t>
-            </a:r>
-            <a:endParaRPr lang="en-US" sz="1600" dirty="0"/>
-          </a:p>
-          <a:p>
-            <a:pPr algn="l" indent="0" marL="0">
-              <a:lnSpc>
-                <a:spcPts val="2080"/>
-              </a:lnSpc>
-              <a:buNone/>
-            </a:pPr>
-            <a:r>
-              <a:rPr lang="en-US" sz="1600" dirty="0">
-                <a:solidFill>
-                  <a:srgbClr val="FFFFFF"/>
-                </a:solidFill>
-                <a:latin typeface="Courier New" pitchFamily="34" charset="0"/>
-                <a:ea typeface="Courier New" pitchFamily="34" charset="-122"/>
-                <a:cs typeface="Courier New" pitchFamily="34" charset="-120"/>
-              </a:rPr>
               <a:t>print(len(X_train), len(X_val), len(X_test))</a:t>
             </a:r>
-            <a:endParaRPr lang="en-US" sz="1600" dirty="0"/>
+            <a:endParaRPr lang="en-US" sz="1800" dirty="0"/>
           </a:p>
         </p:txBody>
       </p:sp>
@@ -8087,8 +8107,8 @@
         </p:nvSpPr>
         <p:spPr>
           <a:xfrm>
-            <a:off x="640080" y="5173472"/>
-            <a:ext cx="8046720" cy="1090168"/>
+            <a:off x="640080" y="5212080"/>
+            <a:ext cx="8046720" cy="1051560"/>
           </a:xfrm>
           <a:prstGeom prst="rect">
             <a:avLst/>
@@ -8163,7 +8183,7 @@
         </p:blipFill>
         <p:spPr>
           <a:xfrm>
-            <a:off x="10241280" y="5175758"/>
+            <a:off x="10241280" y="5214366"/>
             <a:ext cx="1188720" cy="1046988"/>
           </a:xfrm>
           <a:prstGeom prst="rect">
